--- a/media/resources/files/EkiOrunduuKoshuuSandarJanaSozdor.pptx
+++ b/media/resources/files/EkiOrunduuKoshuuSandarJanaSozdor.pptx
@@ -5152,7 +5152,7 @@
                   <a:schemeClr val="tx1"/>
                 </a:solidFill>
               </a:rPr>
-              <a:t>0.17</a:t>
+              <a:t>0,17</a:t>
             </a:r>
             <a:endParaRPr lang="en-GB" sz="1200" b="1" dirty="0">
               <a:solidFill>
@@ -5481,7 +5481,7 @@
                   <a:schemeClr val="tx1"/>
                 </a:solidFill>
               </a:rPr>
-              <a:t>0.81</a:t>
+              <a:t>0,81</a:t>
             </a:r>
             <a:endParaRPr lang="en-GB" sz="1200" b="1" dirty="0">
               <a:solidFill>
@@ -5810,7 +5810,7 @@
                   <a:schemeClr val="tx1"/>
                 </a:solidFill>
               </a:rPr>
-              <a:t>0.8</a:t>
+              <a:t>0,8</a:t>
             </a:r>
             <a:endParaRPr lang="en-GB" sz="1200" b="1" dirty="0">
               <a:solidFill>
@@ -6139,7 +6139,7 @@
                   <a:schemeClr val="tx1"/>
                 </a:solidFill>
               </a:rPr>
-              <a:t>0.111</a:t>
+              <a:t>0,111</a:t>
             </a:r>
           </a:p>
         </p:txBody>
@@ -6463,7 +6463,7 @@
                   <a:schemeClr val="tx1"/>
                 </a:solidFill>
               </a:rPr>
-              <a:t>0.19</a:t>
+              <a:t>0,19</a:t>
             </a:r>
             <a:endParaRPr lang="en-GB" sz="1200" b="1" dirty="0">
               <a:solidFill>
@@ -6792,7 +6792,7 @@
                   <a:schemeClr val="tx1"/>
                 </a:solidFill>
               </a:rPr>
-              <a:t>1.8</a:t>
+              <a:t>1,8</a:t>
             </a:r>
             <a:endParaRPr lang="en-GB" sz="1200" b="1" dirty="0">
               <a:solidFill>
@@ -7121,7 +7121,7 @@
                   <a:schemeClr val="tx1"/>
                 </a:solidFill>
               </a:rPr>
-              <a:t>2.02</a:t>
+              <a:t>2,02</a:t>
             </a:r>
             <a:endParaRPr lang="en-GB" sz="1200" b="1" dirty="0">
               <a:solidFill>
@@ -7450,7 +7450,7 @@
                   <a:schemeClr val="tx1"/>
                 </a:solidFill>
               </a:rPr>
-              <a:t>2.99</a:t>
+              <a:t>2,99</a:t>
             </a:r>
             <a:endParaRPr lang="en-GB" sz="1200" b="1" dirty="0">
               <a:solidFill>
@@ -7779,7 +7779,7 @@
                   <a:schemeClr val="tx1"/>
                 </a:solidFill>
               </a:rPr>
-              <a:t>0.25</a:t>
+              <a:t>0,25</a:t>
             </a:r>
           </a:p>
         </p:txBody>
@@ -8103,7 +8103,7 @@
                   <a:schemeClr val="tx1"/>
                 </a:solidFill>
               </a:rPr>
-              <a:t>1.25</a:t>
+              <a:t>1,25</a:t>
             </a:r>
           </a:p>
         </p:txBody>
@@ -8427,7 +8427,7 @@
                   <a:schemeClr val="tx1"/>
                 </a:solidFill>
               </a:rPr>
-              <a:t>0.82</a:t>
+              <a:t>0,82</a:t>
             </a:r>
           </a:p>
         </p:txBody>
@@ -8751,7 +8751,7 @@
                   <a:schemeClr val="tx1"/>
                 </a:solidFill>
               </a:rPr>
-              <a:t>1.78</a:t>
+              <a:t>1,78</a:t>
             </a:r>
           </a:p>
         </p:txBody>
@@ -9595,7 +9595,7 @@
                   <a:srgbClr val="0070C0"/>
                 </a:solidFill>
               </a:rPr>
-              <a:t>0.57</a:t>
+              <a:t>0,57</a:t>
             </a:r>
             <a:endParaRPr lang="en-GB" sz="1600" b="1" dirty="0">
               <a:solidFill>
@@ -9769,7 +9769,7 @@
                 <a:ea typeface="+mn-ea"/>
                 <a:cs typeface="+mn-cs"/>
               </a:rPr>
-              <a:t>0.17</a:t>
+              <a:t>0,17</a:t>
             </a:r>
             <a:endParaRPr kumimoji="0" lang="en-GB" sz="1200" b="1" i="0" u="none" strike="noStrike" kern="1200" cap="none" spc="0" normalizeH="0" baseline="0" noProof="0" dirty="0">
               <a:ln>
@@ -10084,7 +10084,7 @@
                   <a:srgbClr val="0070C0"/>
                 </a:solidFill>
               </a:rPr>
-              <a:t>0.83</a:t>
+              <a:t>0,83</a:t>
             </a:r>
           </a:p>
         </p:txBody>
@@ -10253,7 +10253,7 @@
                 <a:ea typeface="+mn-ea"/>
                 <a:cs typeface="+mn-cs"/>
               </a:rPr>
-              <a:t>0.81</a:t>
+              <a:t>0,81</a:t>
             </a:r>
             <a:endParaRPr kumimoji="0" lang="en-GB" sz="1200" b="1" i="0" u="none" strike="noStrike" kern="1200" cap="none" spc="0" normalizeH="0" baseline="0" noProof="0" dirty="0">
               <a:ln>
@@ -10568,7 +10568,7 @@
                   <a:srgbClr val="0070C0"/>
                 </a:solidFill>
               </a:rPr>
-              <a:t>1.2</a:t>
+              <a:t>1,2</a:t>
             </a:r>
             <a:endParaRPr lang="en-GB" sz="1600" b="1" dirty="0">
               <a:solidFill>
@@ -10742,7 +10742,7 @@
                 <a:ea typeface="+mn-ea"/>
                 <a:cs typeface="+mn-cs"/>
               </a:rPr>
-              <a:t>0.8</a:t>
+              <a:t>0,8</a:t>
             </a:r>
             <a:endParaRPr kumimoji="0" lang="en-GB" sz="1200" b="1" i="0" u="none" strike="noStrike" kern="1200" cap="none" spc="0" normalizeH="0" baseline="0" noProof="0" dirty="0">
               <a:ln>
@@ -11057,7 +11057,7 @@
                   <a:srgbClr val="0070C0"/>
                 </a:solidFill>
               </a:rPr>
-              <a:t>0.311</a:t>
+              <a:t>0,311</a:t>
             </a:r>
             <a:endParaRPr lang="en-GB" sz="1600" b="1" dirty="0">
               <a:solidFill>
@@ -11231,7 +11231,7 @@
                 <a:ea typeface="+mn-ea"/>
                 <a:cs typeface="+mn-cs"/>
               </a:rPr>
-              <a:t>0.111</a:t>
+              <a:t>0,111</a:t>
             </a:r>
           </a:p>
         </p:txBody>
@@ -11532,7 +11532,7 @@
                   <a:srgbClr val="0070C0"/>
                 </a:solidFill>
               </a:rPr>
-              <a:t>0.21</a:t>
+              <a:t>0,21</a:t>
             </a:r>
             <a:endParaRPr lang="en-GB" sz="1600" b="1" dirty="0">
               <a:solidFill>
@@ -11706,7 +11706,7 @@
                 <a:ea typeface="+mn-ea"/>
                 <a:cs typeface="+mn-cs"/>
               </a:rPr>
-              <a:t>0.19</a:t>
+              <a:t>0,19</a:t>
             </a:r>
             <a:endParaRPr kumimoji="0" lang="en-GB" sz="1200" b="1" i="0" u="none" strike="noStrike" kern="1200" cap="none" spc="0" normalizeH="0" baseline="0" noProof="0" dirty="0">
               <a:ln>
@@ -12220,7 +12220,7 @@
                 <a:ea typeface="+mn-ea"/>
                 <a:cs typeface="+mn-cs"/>
               </a:rPr>
-              <a:t>1.8</a:t>
+              <a:t>1,8</a:t>
             </a:r>
             <a:endParaRPr kumimoji="0" lang="en-GB" sz="1200" b="1" i="0" u="none" strike="noStrike" kern="1200" cap="none" spc="0" normalizeH="0" baseline="0" noProof="0" dirty="0">
               <a:ln>
@@ -12734,7 +12734,7 @@
                 <a:ea typeface="+mn-ea"/>
                 <a:cs typeface="+mn-cs"/>
               </a:rPr>
-              <a:t>2.02</a:t>
+              <a:t>2,02</a:t>
             </a:r>
             <a:endParaRPr kumimoji="0" lang="en-GB" sz="1200" b="1" i="0" u="none" strike="noStrike" kern="1200" cap="none" spc="0" normalizeH="0" baseline="0" noProof="0" dirty="0">
               <a:ln>
@@ -13248,7 +13248,7 @@
                 <a:ea typeface="+mn-ea"/>
                 <a:cs typeface="+mn-cs"/>
               </a:rPr>
-              <a:t>2.99</a:t>
+              <a:t>2,99</a:t>
             </a:r>
             <a:endParaRPr kumimoji="0" lang="en-GB" sz="1200" b="1" i="0" u="none" strike="noStrike" kern="1200" cap="none" spc="0" normalizeH="0" baseline="0" noProof="0" dirty="0">
               <a:ln>
@@ -13762,7 +13762,7 @@
                 <a:ea typeface="+mn-ea"/>
                 <a:cs typeface="+mn-cs"/>
               </a:rPr>
-              <a:t>0.25</a:t>
+              <a:t>0,25</a:t>
             </a:r>
           </a:p>
         </p:txBody>
@@ -14254,7 +14254,7 @@
                 <a:ea typeface="+mn-ea"/>
                 <a:cs typeface="+mn-cs"/>
               </a:rPr>
-              <a:t>1.25</a:t>
+              <a:t>1,25</a:t>
             </a:r>
           </a:p>
         </p:txBody>
@@ -14746,7 +14746,7 @@
                 <a:ea typeface="+mn-ea"/>
                 <a:cs typeface="+mn-cs"/>
               </a:rPr>
-              <a:t>0.82</a:t>
+              <a:t>0,82</a:t>
             </a:r>
           </a:p>
         </p:txBody>
@@ -15238,7 +15238,7 @@
                 <a:ea typeface="+mn-ea"/>
                 <a:cs typeface="+mn-cs"/>
               </a:rPr>
-              <a:t>1.78</a:t>
+              <a:t>1,78</a:t>
             </a:r>
           </a:p>
         </p:txBody>
@@ -16334,7 +16334,7 @@
                   <a:srgbClr val="0070C0"/>
                 </a:solidFill>
               </a:rPr>
-              <a:t>0.57</a:t>
+              <a:t>0,57</a:t>
             </a:r>
             <a:endParaRPr lang="en-GB" sz="1600" b="1" dirty="0">
               <a:solidFill>
@@ -16508,7 +16508,7 @@
                 <a:ea typeface="+mn-ea"/>
                 <a:cs typeface="+mn-cs"/>
               </a:rPr>
-              <a:t>0.17</a:t>
+              <a:t>0,17</a:t>
             </a:r>
             <a:endParaRPr kumimoji="0" lang="en-GB" sz="1200" b="1" i="0" u="none" strike="noStrike" kern="1200" cap="none" spc="0" normalizeH="0" baseline="0" noProof="0" dirty="0">
               <a:ln>
@@ -16823,7 +16823,7 @@
                   <a:srgbClr val="0070C0"/>
                 </a:solidFill>
               </a:rPr>
-              <a:t>0.83</a:t>
+              <a:t>0,83</a:t>
             </a:r>
           </a:p>
         </p:txBody>
@@ -16992,7 +16992,7 @@
                 <a:ea typeface="+mn-ea"/>
                 <a:cs typeface="+mn-cs"/>
               </a:rPr>
-              <a:t>0.81</a:t>
+              <a:t>0,81</a:t>
             </a:r>
             <a:endParaRPr kumimoji="0" lang="en-GB" sz="1200" b="1" i="0" u="none" strike="noStrike" kern="1200" cap="none" spc="0" normalizeH="0" baseline="0" noProof="0" dirty="0">
               <a:ln>
@@ -17307,7 +17307,7 @@
                   <a:srgbClr val="0070C0"/>
                 </a:solidFill>
               </a:rPr>
-              <a:t>1.2</a:t>
+              <a:t>1,2</a:t>
             </a:r>
             <a:endParaRPr lang="en-GB" sz="1600" b="1" dirty="0">
               <a:solidFill>
@@ -17481,7 +17481,7 @@
                 <a:ea typeface="+mn-ea"/>
                 <a:cs typeface="+mn-cs"/>
               </a:rPr>
-              <a:t>0.8</a:t>
+              <a:t>0,8</a:t>
             </a:r>
             <a:endParaRPr kumimoji="0" lang="en-GB" sz="1200" b="1" i="0" u="none" strike="noStrike" kern="1200" cap="none" spc="0" normalizeH="0" baseline="0" noProof="0" dirty="0">
               <a:ln>
@@ -17796,7 +17796,7 @@
                   <a:srgbClr val="0070C0"/>
                 </a:solidFill>
               </a:rPr>
-              <a:t>0.311</a:t>
+              <a:t>0,311</a:t>
             </a:r>
             <a:endParaRPr lang="en-GB" sz="1600" b="1" dirty="0">
               <a:solidFill>
@@ -17970,7 +17970,7 @@
                 <a:ea typeface="+mn-ea"/>
                 <a:cs typeface="+mn-cs"/>
               </a:rPr>
-              <a:t>0.111</a:t>
+              <a:t>0,111</a:t>
             </a:r>
           </a:p>
         </p:txBody>
@@ -18271,7 +18271,7 @@
                   <a:srgbClr val="0070C0"/>
                 </a:solidFill>
               </a:rPr>
-              <a:t>0.21</a:t>
+              <a:t>0,21</a:t>
             </a:r>
             <a:endParaRPr lang="en-GB" sz="1600" b="1" dirty="0">
               <a:solidFill>
@@ -18445,7 +18445,7 @@
                 <a:ea typeface="+mn-ea"/>
                 <a:cs typeface="+mn-cs"/>
               </a:rPr>
-              <a:t>0.19</a:t>
+              <a:t>0,19</a:t>
             </a:r>
             <a:endParaRPr kumimoji="0" lang="en-GB" sz="1200" b="1" i="0" u="none" strike="noStrike" kern="1200" cap="none" spc="0" normalizeH="0" baseline="0" noProof="0" dirty="0">
               <a:ln>
@@ -18776,7 +18776,7 @@
                   <a:srgbClr val="0070C0"/>
                 </a:solidFill>
               </a:rPr>
-              <a:t>2.5</a:t>
+              <a:t>2,5</a:t>
             </a:r>
             <a:endParaRPr kumimoji="0" lang="en-GB" sz="1600" b="1" i="0" u="none" strike="noStrike" kern="1200" cap="none" spc="0" normalizeH="0" baseline="0" noProof="0" dirty="0">
               <a:ln>
@@ -18959,7 +18959,7 @@
                 <a:ea typeface="+mn-ea"/>
                 <a:cs typeface="+mn-cs"/>
               </a:rPr>
-              <a:t>1.8</a:t>
+              <a:t>1,8</a:t>
             </a:r>
             <a:endParaRPr kumimoji="0" lang="en-GB" sz="1200" b="1" i="0" u="none" strike="noStrike" kern="1200" cap="none" spc="0" normalizeH="0" baseline="0" noProof="0" dirty="0">
               <a:ln>
@@ -19274,7 +19274,7 @@
                   <a:srgbClr val="0070C0"/>
                 </a:solidFill>
               </a:rPr>
-              <a:t>2.12</a:t>
+              <a:t>2,12</a:t>
             </a:r>
             <a:endParaRPr lang="en-GB" sz="1600" b="1" dirty="0">
               <a:solidFill>
@@ -19448,7 +19448,7 @@
                 <a:ea typeface="+mn-ea"/>
                 <a:cs typeface="+mn-cs"/>
               </a:rPr>
-              <a:t>2.02</a:t>
+              <a:t>2,02</a:t>
             </a:r>
             <a:endParaRPr kumimoji="0" lang="en-GB" sz="1200" b="1" i="0" u="none" strike="noStrike" kern="1200" cap="none" spc="0" normalizeH="0" baseline="0" noProof="0" dirty="0">
               <a:ln>
@@ -19763,7 +19763,7 @@
                   <a:srgbClr val="0070C0"/>
                 </a:solidFill>
               </a:rPr>
-              <a:t>3.06</a:t>
+              <a:t>3,06</a:t>
             </a:r>
             <a:endParaRPr lang="en-GB" sz="1600" b="1" dirty="0">
               <a:solidFill>
@@ -19937,7 +19937,7 @@
                 <a:ea typeface="+mn-ea"/>
                 <a:cs typeface="+mn-cs"/>
               </a:rPr>
-              <a:t>2.99</a:t>
+              <a:t>2,99</a:t>
             </a:r>
             <a:endParaRPr kumimoji="0" lang="en-GB" sz="1200" b="1" i="0" u="none" strike="noStrike" kern="1200" cap="none" spc="0" normalizeH="0" baseline="0" noProof="0" dirty="0">
               <a:ln>
@@ -20252,7 +20252,7 @@
                   <a:srgbClr val="0070C0"/>
                 </a:solidFill>
               </a:rPr>
-              <a:t>0.57</a:t>
+              <a:t>0,57</a:t>
             </a:r>
             <a:endParaRPr lang="en-GB" sz="1600" b="1" dirty="0">
               <a:solidFill>
@@ -20426,7 +20426,7 @@
                 <a:ea typeface="+mn-ea"/>
                 <a:cs typeface="+mn-cs"/>
               </a:rPr>
-              <a:t>0.25</a:t>
+              <a:t>0,25</a:t>
             </a:r>
           </a:p>
         </p:txBody>
@@ -20743,7 +20743,7 @@
                   <a:srgbClr val="0070C0"/>
                 </a:solidFill>
               </a:rPr>
-              <a:t>1.8</a:t>
+              <a:t>1,8</a:t>
             </a:r>
             <a:endParaRPr kumimoji="0" lang="en-GB" sz="1600" b="1" i="0" u="none" strike="noStrike" kern="1200" cap="none" spc="0" normalizeH="0" baseline="0" noProof="0" dirty="0">
               <a:ln>
@@ -20926,7 +20926,7 @@
                 <a:ea typeface="+mn-ea"/>
                 <a:cs typeface="+mn-cs"/>
               </a:rPr>
-              <a:t>1.25</a:t>
+              <a:t>1,25</a:t>
             </a:r>
           </a:p>
         </p:txBody>
@@ -21227,7 +21227,7 @@
                   <a:srgbClr val="0070C0"/>
                 </a:solidFill>
               </a:rPr>
-              <a:t>1.58</a:t>
+              <a:t>1,58</a:t>
             </a:r>
             <a:endParaRPr lang="en-GB" sz="1600" b="1" dirty="0">
               <a:solidFill>
@@ -21401,7 +21401,7 @@
                 <a:ea typeface="+mn-ea"/>
                 <a:cs typeface="+mn-cs"/>
               </a:rPr>
-              <a:t>0.82</a:t>
+              <a:t>0,82</a:t>
             </a:r>
           </a:p>
         </p:txBody>
@@ -21702,7 +21702,7 @@
                   <a:srgbClr val="0070C0"/>
                 </a:solidFill>
               </a:rPr>
-              <a:t>2.45</a:t>
+              <a:t>2,45</a:t>
             </a:r>
           </a:p>
         </p:txBody>
@@ -21871,7 +21871,7 @@
                 <a:ea typeface="+mn-ea"/>
                 <a:cs typeface="+mn-cs"/>
               </a:rPr>
-              <a:t>1.78</a:t>
+              <a:t>1,78</a:t>
             </a:r>
           </a:p>
         </p:txBody>
